--- a/docs/entreprise/deck/Quantinvo-essentiel.pptx
+++ b/docs/entreprise/deck/Quantinvo-essentiel.pptx
@@ -5739,7 +5739,7 @@
                 <a:ea typeface="Arial" pitchFamily="34" charset="-122"/>
                 <a:cs typeface="Arial" pitchFamily="34" charset="-120"/>
               </a:rPr>
-              <a:t>65 €</a:t>
+              <a:t>89 €</a:t>
             </a:r>
             <a:pPr indent="0" marL="0">
               <a:buNone/>
@@ -5792,7 +5792,7 @@
                 <a:ea typeface="Arial" pitchFamily="34" charset="-122"/>
                 <a:cs typeface="Arial" pitchFamily="34" charset="-120"/>
               </a:rPr>
-              <a:t>ou 690 € à l’année — 90 € de moins</a:t>
+              <a:t>ou 950 € à l’année — 118 € de moins</a:t>
             </a:r>
             <a:endParaRPr lang="en-US" sz="950" dirty="0"/>
           </a:p>
@@ -6017,7 +6017,7 @@
                 <a:ea typeface="Arial" pitchFamily="34" charset="-122"/>
                 <a:cs typeface="Arial" pitchFamily="34" charset="-120"/>
               </a:rPr>
-              <a:t>225 €</a:t>
+              <a:t>310 €</a:t>
             </a:r>
             <a:pPr indent="0" marL="0">
               <a:buNone/>
@@ -6070,7 +6070,7 @@
                 <a:ea typeface="Arial" pitchFamily="34" charset="-122"/>
                 <a:cs typeface="Arial" pitchFamily="34" charset="-120"/>
               </a:rPr>
-              <a:t>ou 2 400 € à l’année — 300 € de moins</a:t>
+              <a:t>ou 3 300 € à l’année — 420 € de moins</a:t>
             </a:r>
             <a:endParaRPr lang="en-US" sz="950" dirty="0"/>
           </a:p>
@@ -6256,7 +6256,7 @@
                 <a:ea typeface="Arial" pitchFamily="34" charset="-122"/>
                 <a:cs typeface="Arial" pitchFamily="34" charset="-120"/>
               </a:rPr>
-              <a:t>650 €</a:t>
+              <a:t>890 €</a:t>
             </a:r>
             <a:pPr indent="0" marL="0">
               <a:buNone/>
@@ -6309,7 +6309,7 @@
                 <a:ea typeface="Arial" pitchFamily="34" charset="-122"/>
                 <a:cs typeface="Arial" pitchFamily="34" charset="-120"/>
               </a:rPr>
-              <a:t>ou 6 900 € à l’année — 900 € de moins</a:t>
+              <a:t>ou 9 450 € à l’année — 1 230 € de moins</a:t>
             </a:r>
             <a:endParaRPr lang="en-US" sz="950" dirty="0"/>
           </a:p>

--- a/docs/entreprise/deck/Quantinvo-essentiel.pptx
+++ b/docs/entreprise/deck/Quantinvo-essentiel.pptx
@@ -1727,7 +1727,7 @@
             <a:r>
               <a:rPr lang="en-US" sz="2400" b="1" dirty="0">
                 <a:solidFill>
-                  <a:srgbClr val="0B0F19"/>
+                  <a:srgbClr val="14181A"/>
                 </a:solidFill>
                 <a:latin typeface="Arial" pitchFamily="34" charset="0"/>
                 <a:ea typeface="Arial" pitchFamily="34" charset="-122"/>
@@ -1748,17 +1748,17 @@
         <p:spPr>
           <a:xfrm>
             <a:off x="731520" y="1481328"/>
-            <a:ext cx="2377440" cy="25603"/>
+            <a:ext cx="2011680" cy="20117"/>
           </a:xfrm>
           <a:prstGeom prst="rect">
             <a:avLst/>
           </a:prstGeom>
           <a:solidFill>
-            <a:srgbClr val="38C9FF"/>
+            <a:srgbClr val="14181A"/>
           </a:solidFill>
           <a:ln w="12700">
             <a:solidFill>
-              <a:srgbClr val="38C9FF"/>
+              <a:srgbClr val="14181A"/>
             </a:solidFill>
             <a:prstDash val="solid"/>
           </a:ln>
@@ -1791,7 +1791,7 @@
             <a:r>
               <a:rPr lang="en-US" sz="1300" dirty="0">
                 <a:solidFill>
-                  <a:srgbClr val="5B6475"/>
+                  <a:srgbClr val="575F5C"/>
                 </a:solidFill>
                 <a:latin typeface="Arial" pitchFamily="34" charset="0"/>
                 <a:ea typeface="Arial" pitchFamily="34" charset="-122"/>
@@ -1833,7 +1833,7 @@
             <a:r>
               <a:rPr lang="en-US" sz="4000" b="1" dirty="0">
                 <a:solidFill>
-                  <a:srgbClr val="4636B0"/>
+                  <a:srgbClr val="14181A"/>
                 </a:solidFill>
                 <a:latin typeface="Arial" pitchFamily="34" charset="0"/>
                 <a:ea typeface="Arial" pitchFamily="34" charset="-122"/>
@@ -1875,7 +1875,7 @@
             <a:r>
               <a:rPr lang="en-US" sz="1500" dirty="0">
                 <a:solidFill>
-                  <a:srgbClr val="3D4556"/>
+                  <a:srgbClr val="3A423F"/>
                 </a:solidFill>
                 <a:latin typeface="Arial" pitchFamily="34" charset="0"/>
                 <a:ea typeface="Arial" pitchFamily="34" charset="-122"/>
@@ -1914,7 +1914,7 @@
             <a:r>
               <a:rPr lang="en-US" sz="1050" dirty="0">
                 <a:solidFill>
-                  <a:srgbClr val="5B6475"/>
+                  <a:srgbClr val="575F5C"/>
                 </a:solidFill>
                 <a:latin typeface="Arial" pitchFamily="34" charset="0"/>
                 <a:ea typeface="Arial" pitchFamily="34" charset="-122"/>
@@ -2009,7 +2009,7 @@
             <a:r>
               <a:rPr lang="en-US" sz="2400" b="1" dirty="0">
                 <a:solidFill>
-                  <a:srgbClr val="0B0F19"/>
+                  <a:srgbClr val="14181A"/>
                 </a:solidFill>
                 <a:latin typeface="Arial" pitchFamily="34" charset="0"/>
                 <a:ea typeface="Arial" pitchFamily="34" charset="-122"/>
@@ -2030,17 +2030,17 @@
         <p:spPr>
           <a:xfrm>
             <a:off x="731520" y="1481328"/>
-            <a:ext cx="2377440" cy="25603"/>
+            <a:ext cx="2011680" cy="20117"/>
           </a:xfrm>
           <a:prstGeom prst="rect">
             <a:avLst/>
           </a:prstGeom>
           <a:solidFill>
-            <a:srgbClr val="38C9FF"/>
+            <a:srgbClr val="14181A"/>
           </a:solidFill>
           <a:ln w="12700">
             <a:solidFill>
-              <a:srgbClr val="38C9FF"/>
+              <a:srgbClr val="14181A"/>
             </a:solidFill>
             <a:prstDash val="solid"/>
           </a:ln>
@@ -2076,7 +2076,7 @@
             <a:r>
               <a:rPr lang="en-US" sz="3600" b="1" dirty="0">
                 <a:solidFill>
-                  <a:srgbClr val="4636B0"/>
+                  <a:srgbClr val="14181A"/>
                 </a:solidFill>
                 <a:latin typeface="Arial" pitchFamily="34" charset="0"/>
                 <a:ea typeface="Arial" pitchFamily="34" charset="-122"/>
@@ -2118,7 +2118,7 @@
             <a:r>
               <a:rPr lang="en-US" sz="1450" dirty="0">
                 <a:solidFill>
-                  <a:srgbClr val="3D4556"/>
+                  <a:srgbClr val="3A423F"/>
                 </a:solidFill>
                 <a:latin typeface="Arial" pitchFamily="34" charset="0"/>
                 <a:ea typeface="Arial" pitchFamily="34" charset="-122"/>
@@ -2157,7 +2157,7 @@
             <a:r>
               <a:rPr lang="en-US" sz="1500" b="1" dirty="0">
                 <a:solidFill>
-                  <a:srgbClr val="4636B0"/>
+                  <a:srgbClr val="14181A"/>
                 </a:solidFill>
                 <a:latin typeface="Arial" pitchFamily="34" charset="0"/>
                 <a:ea typeface="Arial" pitchFamily="34" charset="-122"/>
@@ -2196,7 +2196,7 @@
             <a:r>
               <a:rPr lang="en-US" sz="1050" dirty="0">
                 <a:solidFill>
-                  <a:srgbClr val="5B6475"/>
+                  <a:srgbClr val="575F5C"/>
                 </a:solidFill>
                 <a:latin typeface="Arial" pitchFamily="34" charset="0"/>
                 <a:ea typeface="Arial" pitchFamily="34" charset="-122"/>
@@ -2291,7 +2291,7 @@
             <a:r>
               <a:rPr lang="en-US" sz="1600" b="1" dirty="0">
                 <a:solidFill>
-                  <a:srgbClr val="0B0F19"/>
+                  <a:srgbClr val="14181A"/>
                 </a:solidFill>
                 <a:latin typeface="Arial" pitchFamily="34" charset="0"/>
                 <a:ea typeface="Arial" pitchFamily="34" charset="-122"/>
@@ -2330,7 +2330,7 @@
             <a:r>
               <a:rPr lang="en-US" sz="1000" dirty="0">
                 <a:solidFill>
-                  <a:srgbClr val="5B6475"/>
+                  <a:srgbClr val="575F5C"/>
                 </a:solidFill>
                 <a:latin typeface="Arial" pitchFamily="34" charset="0"/>
                 <a:ea typeface="Arial" pitchFamily="34" charset="-122"/>
@@ -2351,17 +2351,17 @@
         <p:spPr>
           <a:xfrm>
             <a:off x="731520" y="877824"/>
-            <a:ext cx="10725912" cy="25603"/>
+            <a:ext cx="10725912" cy="10973"/>
           </a:xfrm>
           <a:prstGeom prst="rect">
             <a:avLst/>
           </a:prstGeom>
           <a:solidFill>
-            <a:srgbClr val="38C9FF"/>
+            <a:srgbClr val="E2E5E1"/>
           </a:solidFill>
           <a:ln w="12700">
             <a:solidFill>
-              <a:srgbClr val="38C9FF"/>
+              <a:srgbClr val="E2E5E1"/>
             </a:solidFill>
             <a:prstDash val="solid"/>
           </a:ln>
@@ -2397,7 +2397,7 @@
             <a:r>
               <a:rPr lang="en-US" sz="2600" b="1" dirty="0">
                 <a:solidFill>
-                  <a:srgbClr val="4636B0"/>
+                  <a:srgbClr val="14181A"/>
                 </a:solidFill>
                 <a:latin typeface="Arial" pitchFamily="34" charset="0"/>
                 <a:ea typeface="Arial" pitchFamily="34" charset="-122"/>
@@ -2436,7 +2436,7 @@
             <a:r>
               <a:rPr lang="en-US" sz="5400" b="1" dirty="0">
                 <a:solidFill>
-                  <a:srgbClr val="4636B0"/>
+                  <a:srgbClr val="1E4D3B"/>
                 </a:solidFill>
                 <a:latin typeface="Arial" pitchFamily="34" charset="0"/>
                 <a:ea typeface="Arial" pitchFamily="34" charset="-122"/>
@@ -2478,7 +2478,7 @@
             <a:r>
               <a:rPr lang="en-US" sz="1200" dirty="0">
                 <a:solidFill>
-                  <a:srgbClr val="5B6475"/>
+                  <a:srgbClr val="575F5C"/>
                 </a:solidFill>
                 <a:latin typeface="Arial" pitchFamily="34" charset="0"/>
                 <a:ea typeface="Arial" pitchFamily="34" charset="-122"/>
@@ -2523,7 +2523,7 @@
             <a:r>
               <a:rPr lang="en-US" sz="1300" b="1" dirty="0">
                 <a:solidFill>
-                  <a:srgbClr val="0B0F19"/>
+                  <a:srgbClr val="14181A"/>
                 </a:solidFill>
                 <a:latin typeface="Arial" pitchFamily="34" charset="0"/>
                 <a:ea typeface="Arial" pitchFamily="34" charset="-122"/>
@@ -2543,7 +2543,7 @@
             <a:r>
               <a:rPr lang="en-US" sz="1300" dirty="0">
                 <a:solidFill>
-                  <a:srgbClr val="3D4556"/>
+                  <a:srgbClr val="3A423F"/>
                 </a:solidFill>
                 <a:latin typeface="Arial" pitchFamily="34" charset="0"/>
                 <a:ea typeface="Arial" pitchFamily="34" charset="-122"/>
@@ -2566,7 +2566,7 @@
             <a:r>
               <a:rPr lang="en-US" sz="1300" b="1" dirty="0">
                 <a:solidFill>
-                  <a:srgbClr val="0B0F19"/>
+                  <a:srgbClr val="14181A"/>
                 </a:solidFill>
                 <a:latin typeface="Arial" pitchFamily="34" charset="0"/>
                 <a:ea typeface="Arial" pitchFamily="34" charset="-122"/>
@@ -2586,7 +2586,7 @@
             <a:r>
               <a:rPr lang="en-US" sz="1300" dirty="0">
                 <a:solidFill>
-                  <a:srgbClr val="3D4556"/>
+                  <a:srgbClr val="3A423F"/>
                 </a:solidFill>
                 <a:latin typeface="Arial" pitchFamily="34" charset="0"/>
                 <a:ea typeface="Arial" pitchFamily="34" charset="-122"/>
@@ -2609,7 +2609,7 @@
             <a:r>
               <a:rPr lang="en-US" sz="1300" b="1" dirty="0">
                 <a:solidFill>
-                  <a:srgbClr val="0B0F19"/>
+                  <a:srgbClr val="14181A"/>
                 </a:solidFill>
                 <a:latin typeface="Arial" pitchFamily="34" charset="0"/>
                 <a:ea typeface="Arial" pitchFamily="34" charset="-122"/>
@@ -2629,7 +2629,7 @@
             <a:r>
               <a:rPr lang="en-US" sz="1300" dirty="0">
                 <a:solidFill>
-                  <a:srgbClr val="3D4556"/>
+                  <a:srgbClr val="3A423F"/>
                 </a:solidFill>
                 <a:latin typeface="Arial" pitchFamily="34" charset="0"/>
                 <a:ea typeface="Arial" pitchFamily="34" charset="-122"/>
@@ -2652,7 +2652,7 @@
             <a:r>
               <a:rPr lang="en-US" sz="1300" b="1" dirty="0">
                 <a:solidFill>
-                  <a:srgbClr val="0B0F19"/>
+                  <a:srgbClr val="14181A"/>
                 </a:solidFill>
                 <a:latin typeface="Arial" pitchFamily="34" charset="0"/>
                 <a:ea typeface="Arial" pitchFamily="34" charset="-122"/>
@@ -2672,7 +2672,7 @@
             <a:r>
               <a:rPr lang="en-US" sz="1300" dirty="0">
                 <a:solidFill>
-                  <a:srgbClr val="3D4556"/>
+                  <a:srgbClr val="3A423F"/>
                 </a:solidFill>
                 <a:latin typeface="Arial" pitchFamily="34" charset="0"/>
                 <a:ea typeface="Arial" pitchFamily="34" charset="-122"/>
@@ -2711,7 +2711,7 @@
             <a:r>
               <a:rPr lang="en-US" sz="900" dirty="0">
                 <a:solidFill>
-                  <a:srgbClr val="5B6475"/>
+                  <a:srgbClr val="575F5C"/>
                 </a:solidFill>
                 <a:latin typeface="Arial" pitchFamily="34" charset="0"/>
                 <a:ea typeface="Arial" pitchFamily="34" charset="-122"/>
@@ -2750,7 +2750,7 @@
             <a:r>
               <a:rPr lang="en-US" sz="900" dirty="0">
                 <a:solidFill>
-                  <a:srgbClr val="5B6475"/>
+                  <a:srgbClr val="575F5C"/>
                 </a:solidFill>
                 <a:latin typeface="Arial" pitchFamily="34" charset="0"/>
                 <a:ea typeface="Arial" pitchFamily="34" charset="-122"/>
@@ -2845,7 +2845,7 @@
             <a:r>
               <a:rPr lang="en-US" sz="1600" b="1" dirty="0">
                 <a:solidFill>
-                  <a:srgbClr val="0B0F19"/>
+                  <a:srgbClr val="14181A"/>
                 </a:solidFill>
                 <a:latin typeface="Arial" pitchFamily="34" charset="0"/>
                 <a:ea typeface="Arial" pitchFamily="34" charset="-122"/>
@@ -2884,7 +2884,7 @@
             <a:r>
               <a:rPr lang="en-US" sz="1000" dirty="0">
                 <a:solidFill>
-                  <a:srgbClr val="5B6475"/>
+                  <a:srgbClr val="575F5C"/>
                 </a:solidFill>
                 <a:latin typeface="Arial" pitchFamily="34" charset="0"/>
                 <a:ea typeface="Arial" pitchFamily="34" charset="-122"/>
@@ -2905,17 +2905,17 @@
         <p:spPr>
           <a:xfrm>
             <a:off x="731520" y="877824"/>
-            <a:ext cx="10725912" cy="25603"/>
+            <a:ext cx="10725912" cy="10973"/>
           </a:xfrm>
           <a:prstGeom prst="rect">
             <a:avLst/>
           </a:prstGeom>
           <a:solidFill>
-            <a:srgbClr val="38C9FF"/>
+            <a:srgbClr val="E2E5E1"/>
           </a:solidFill>
           <a:ln w="12700">
             <a:solidFill>
-              <a:srgbClr val="38C9FF"/>
+              <a:srgbClr val="E2E5E1"/>
             </a:solidFill>
             <a:prstDash val="solid"/>
           </a:ln>
@@ -2951,7 +2951,7 @@
             <a:r>
               <a:rPr lang="en-US" sz="2500" b="1" dirty="0">
                 <a:solidFill>
-                  <a:srgbClr val="4636B0"/>
+                  <a:srgbClr val="14181A"/>
                 </a:solidFill>
                 <a:latin typeface="Arial" pitchFamily="34" charset="0"/>
                 <a:ea typeface="Arial" pitchFamily="34" charset="-122"/>
@@ -2993,7 +2993,7 @@
             <a:r>
               <a:rPr lang="en-US" sz="1350" b="1" dirty="0">
                 <a:solidFill>
-                  <a:srgbClr val="4636B0"/>
+                  <a:srgbClr val="14181A"/>
                 </a:solidFill>
                 <a:latin typeface="Arial" pitchFamily="34" charset="0"/>
                 <a:ea typeface="Arial" pitchFamily="34" charset="-122"/>
@@ -3035,7 +3035,7 @@
             <a:r>
               <a:rPr lang="en-US" sz="1100" dirty="0">
                 <a:solidFill>
-                  <a:srgbClr val="3D4556"/>
+                  <a:srgbClr val="3A423F"/>
                 </a:solidFill>
                 <a:latin typeface="Arial" pitchFamily="34" charset="0"/>
                 <a:ea typeface="Arial" pitchFamily="34" charset="-122"/>
@@ -3060,15 +3060,15 @@
           </a:xfrm>
           <a:prstGeom prst="roundRect">
             <a:avLst>
-              <a:gd name="adj" fmla="val 3857"/>
+              <a:gd name="adj" fmla="val 1102"/>
             </a:avLst>
           </a:prstGeom>
           <a:solidFill>
-            <a:srgbClr val="F4F5F9"/>
+            <a:srgbClr val="F2F3F1"/>
           </a:solidFill>
           <a:ln w="12700">
             <a:solidFill>
-              <a:srgbClr val="F4F5F9"/>
+              <a:srgbClr val="F2F3F1"/>
             </a:solidFill>
             <a:prstDash val="solid"/>
           </a:ln>
@@ -3128,7 +3128,7 @@
             <a:r>
               <a:rPr lang="en-US" sz="1350" b="1" dirty="0">
                 <a:solidFill>
-                  <a:srgbClr val="4636B0"/>
+                  <a:srgbClr val="14181A"/>
                 </a:solidFill>
                 <a:latin typeface="Arial" pitchFamily="34" charset="0"/>
                 <a:ea typeface="Arial" pitchFamily="34" charset="-122"/>
@@ -3170,7 +3170,7 @@
             <a:r>
               <a:rPr lang="en-US" sz="1100" dirty="0">
                 <a:solidFill>
-                  <a:srgbClr val="3D4556"/>
+                  <a:srgbClr val="3A423F"/>
                 </a:solidFill>
                 <a:latin typeface="Arial" pitchFamily="34" charset="0"/>
                 <a:ea typeface="Arial" pitchFamily="34" charset="-122"/>
@@ -3195,15 +3195,15 @@
           </a:xfrm>
           <a:prstGeom prst="roundRect">
             <a:avLst>
-              <a:gd name="adj" fmla="val 3857"/>
+              <a:gd name="adj" fmla="val 1102"/>
             </a:avLst>
           </a:prstGeom>
           <a:solidFill>
-            <a:srgbClr val="EEEEFC"/>
+            <a:srgbClr val="E7EDE9"/>
           </a:solidFill>
           <a:ln w="12700">
             <a:solidFill>
-              <a:srgbClr val="EEEEFC"/>
+              <a:srgbClr val="E7EDE9"/>
             </a:solidFill>
             <a:prstDash val="solid"/>
           </a:ln>
@@ -3263,7 +3263,7 @@
             <a:r>
               <a:rPr lang="en-US" sz="1350" b="1" dirty="0">
                 <a:solidFill>
-                  <a:srgbClr val="4636B0"/>
+                  <a:srgbClr val="14181A"/>
                 </a:solidFill>
                 <a:latin typeface="Arial" pitchFamily="34" charset="0"/>
                 <a:ea typeface="Arial" pitchFamily="34" charset="-122"/>
@@ -3305,7 +3305,7 @@
             <a:r>
               <a:rPr lang="en-US" sz="1100" dirty="0">
                 <a:solidFill>
-                  <a:srgbClr val="3D4556"/>
+                  <a:srgbClr val="3A423F"/>
                 </a:solidFill>
                 <a:latin typeface="Arial" pitchFamily="34" charset="0"/>
                 <a:ea typeface="Arial" pitchFamily="34" charset="-122"/>
@@ -3330,15 +3330,15 @@
           </a:xfrm>
           <a:prstGeom prst="roundRect">
             <a:avLst>
-              <a:gd name="adj" fmla="val 3857"/>
+              <a:gd name="adj" fmla="val 1102"/>
             </a:avLst>
           </a:prstGeom>
           <a:solidFill>
-            <a:srgbClr val="F4F5F9"/>
+            <a:srgbClr val="F2F3F1"/>
           </a:solidFill>
           <a:ln w="12700">
             <a:solidFill>
-              <a:srgbClr val="F4F5F9"/>
+              <a:srgbClr val="F2F3F1"/>
             </a:solidFill>
             <a:prstDash val="solid"/>
           </a:ln>
@@ -3395,7 +3395,7 @@
             <a:r>
               <a:rPr lang="en-US" sz="900" dirty="0">
                 <a:solidFill>
-                  <a:srgbClr val="5B6475"/>
+                  <a:srgbClr val="575F5C"/>
                 </a:solidFill>
                 <a:latin typeface="Arial" pitchFamily="34" charset="0"/>
                 <a:ea typeface="Arial" pitchFamily="34" charset="-122"/>
@@ -3434,7 +3434,7 @@
             <a:r>
               <a:rPr lang="en-US" sz="900" dirty="0">
                 <a:solidFill>
-                  <a:srgbClr val="5B6475"/>
+                  <a:srgbClr val="575F5C"/>
                 </a:solidFill>
                 <a:latin typeface="Arial" pitchFamily="34" charset="0"/>
                 <a:ea typeface="Arial" pitchFamily="34" charset="-122"/>
@@ -3529,7 +3529,7 @@
             <a:r>
               <a:rPr lang="en-US" sz="1600" b="1" dirty="0">
                 <a:solidFill>
-                  <a:srgbClr val="0B0F19"/>
+                  <a:srgbClr val="14181A"/>
                 </a:solidFill>
                 <a:latin typeface="Arial" pitchFamily="34" charset="0"/>
                 <a:ea typeface="Arial" pitchFamily="34" charset="-122"/>
@@ -3568,7 +3568,7 @@
             <a:r>
               <a:rPr lang="en-US" sz="1000" dirty="0">
                 <a:solidFill>
-                  <a:srgbClr val="5B6475"/>
+                  <a:srgbClr val="575F5C"/>
                 </a:solidFill>
                 <a:latin typeface="Arial" pitchFamily="34" charset="0"/>
                 <a:ea typeface="Arial" pitchFamily="34" charset="-122"/>
@@ -3589,17 +3589,17 @@
         <p:spPr>
           <a:xfrm>
             <a:off x="731520" y="877824"/>
-            <a:ext cx="10725912" cy="25603"/>
+            <a:ext cx="10725912" cy="10973"/>
           </a:xfrm>
           <a:prstGeom prst="rect">
             <a:avLst/>
           </a:prstGeom>
           <a:solidFill>
-            <a:srgbClr val="38C9FF"/>
+            <a:srgbClr val="E2E5E1"/>
           </a:solidFill>
           <a:ln w="12700">
             <a:solidFill>
-              <a:srgbClr val="38C9FF"/>
+              <a:srgbClr val="E2E5E1"/>
             </a:solidFill>
             <a:prstDash val="solid"/>
           </a:ln>
@@ -3635,7 +3635,7 @@
             <a:r>
               <a:rPr lang="en-US" sz="2600" b="1" dirty="0">
                 <a:solidFill>
-                  <a:srgbClr val="4636B0"/>
+                  <a:srgbClr val="14181A"/>
                 </a:solidFill>
                 <a:latin typeface="Arial" pitchFamily="34" charset="0"/>
                 <a:ea typeface="Arial" pitchFamily="34" charset="-122"/>
@@ -3674,7 +3674,7 @@
             <a:r>
               <a:rPr lang="en-US" sz="1050" b="1" dirty="0">
                 <a:solidFill>
-                  <a:srgbClr val="5B6475"/>
+                  <a:srgbClr val="575F5C"/>
                 </a:solidFill>
                 <a:latin typeface="Arial" pitchFamily="34" charset="0"/>
                 <a:ea typeface="Arial" pitchFamily="34" charset="-122"/>
@@ -3713,7 +3713,7 @@
             <a:r>
               <a:rPr lang="en-US" sz="1050" b="1" dirty="0">
                 <a:solidFill>
-                  <a:srgbClr val="4636B0"/>
+                  <a:srgbClr val="14181A"/>
                 </a:solidFill>
                 <a:latin typeface="Arial" pitchFamily="34" charset="0"/>
                 <a:ea typeface="Arial" pitchFamily="34" charset="-122"/>
@@ -3742,7 +3742,7 @@
           <a:noFill/>
           <a:ln w="9525">
             <a:solidFill>
-              <a:srgbClr val="E3E6EE"/>
+              <a:srgbClr val="E2E5E1"/>
             </a:solidFill>
             <a:prstDash val="solid"/>
           </a:ln>
@@ -3778,7 +3778,7 @@
             <a:r>
               <a:rPr lang="en-US" sz="1150" dirty="0">
                 <a:solidFill>
-                  <a:srgbClr val="3D4556"/>
+                  <a:srgbClr val="3A423F"/>
                 </a:solidFill>
                 <a:latin typeface="Arial" pitchFamily="34" charset="0"/>
                 <a:ea typeface="Arial" pitchFamily="34" charset="-122"/>
@@ -3820,7 +3820,7 @@
             <a:r>
               <a:rPr lang="en-US" sz="1150" dirty="0">
                 <a:solidFill>
-                  <a:srgbClr val="0B0F19"/>
+                  <a:srgbClr val="14181A"/>
                 </a:solidFill>
                 <a:latin typeface="Arial" pitchFamily="34" charset="0"/>
                 <a:ea typeface="Arial" pitchFamily="34" charset="-122"/>
@@ -3849,7 +3849,7 @@
           <a:noFill/>
           <a:ln w="9525">
             <a:solidFill>
-              <a:srgbClr val="E3E6EE"/>
+              <a:srgbClr val="E2E5E1"/>
             </a:solidFill>
             <a:prstDash val="solid"/>
           </a:ln>
@@ -3885,7 +3885,7 @@
             <a:r>
               <a:rPr lang="en-US" sz="1150" dirty="0">
                 <a:solidFill>
-                  <a:srgbClr val="3D4556"/>
+                  <a:srgbClr val="3A423F"/>
                 </a:solidFill>
                 <a:latin typeface="Arial" pitchFamily="34" charset="0"/>
                 <a:ea typeface="Arial" pitchFamily="34" charset="-122"/>
@@ -3927,7 +3927,7 @@
             <a:r>
               <a:rPr lang="en-US" sz="1150" dirty="0">
                 <a:solidFill>
-                  <a:srgbClr val="0B0F19"/>
+                  <a:srgbClr val="14181A"/>
                 </a:solidFill>
                 <a:latin typeface="Arial" pitchFamily="34" charset="0"/>
                 <a:ea typeface="Arial" pitchFamily="34" charset="-122"/>
@@ -3956,7 +3956,7 @@
           <a:noFill/>
           <a:ln w="9525">
             <a:solidFill>
-              <a:srgbClr val="E3E6EE"/>
+              <a:srgbClr val="E2E5E1"/>
             </a:solidFill>
             <a:prstDash val="solid"/>
           </a:ln>
@@ -3992,7 +3992,7 @@
             <a:r>
               <a:rPr lang="en-US" sz="1150" dirty="0">
                 <a:solidFill>
-                  <a:srgbClr val="3D4556"/>
+                  <a:srgbClr val="3A423F"/>
                 </a:solidFill>
                 <a:latin typeface="Arial" pitchFamily="34" charset="0"/>
                 <a:ea typeface="Arial" pitchFamily="34" charset="-122"/>
@@ -4034,7 +4034,7 @@
             <a:r>
               <a:rPr lang="en-US" sz="1150" dirty="0">
                 <a:solidFill>
-                  <a:srgbClr val="0B0F19"/>
+                  <a:srgbClr val="14181A"/>
                 </a:solidFill>
                 <a:latin typeface="Arial" pitchFamily="34" charset="0"/>
                 <a:ea typeface="Arial" pitchFamily="34" charset="-122"/>
@@ -4063,7 +4063,7 @@
           <a:noFill/>
           <a:ln w="9525">
             <a:solidFill>
-              <a:srgbClr val="E3E6EE"/>
+              <a:srgbClr val="E2E5E1"/>
             </a:solidFill>
             <a:prstDash val="solid"/>
           </a:ln>
@@ -4099,7 +4099,7 @@
             <a:r>
               <a:rPr lang="en-US" sz="1150" dirty="0">
                 <a:solidFill>
-                  <a:srgbClr val="3D4556"/>
+                  <a:srgbClr val="3A423F"/>
                 </a:solidFill>
                 <a:latin typeface="Arial" pitchFamily="34" charset="0"/>
                 <a:ea typeface="Arial" pitchFamily="34" charset="-122"/>
@@ -4141,7 +4141,7 @@
             <a:r>
               <a:rPr lang="en-US" sz="1150" dirty="0">
                 <a:solidFill>
-                  <a:srgbClr val="0B0F19"/>
+                  <a:srgbClr val="14181A"/>
                 </a:solidFill>
                 <a:latin typeface="Arial" pitchFamily="34" charset="0"/>
                 <a:ea typeface="Arial" pitchFamily="34" charset="-122"/>
@@ -4170,7 +4170,7 @@
           <a:noFill/>
           <a:ln w="9525">
             <a:solidFill>
-              <a:srgbClr val="E3E6EE"/>
+              <a:srgbClr val="E2E5E1"/>
             </a:solidFill>
             <a:prstDash val="solid"/>
           </a:ln>
@@ -4206,7 +4206,7 @@
             <a:r>
               <a:rPr lang="en-US" sz="1150" dirty="0">
                 <a:solidFill>
-                  <a:srgbClr val="3D4556"/>
+                  <a:srgbClr val="3A423F"/>
                 </a:solidFill>
                 <a:latin typeface="Arial" pitchFamily="34" charset="0"/>
                 <a:ea typeface="Arial" pitchFamily="34" charset="-122"/>
@@ -4248,7 +4248,7 @@
             <a:r>
               <a:rPr lang="en-US" sz="1150" dirty="0">
                 <a:solidFill>
-                  <a:srgbClr val="0B0F19"/>
+                  <a:srgbClr val="14181A"/>
                 </a:solidFill>
                 <a:latin typeface="Arial" pitchFamily="34" charset="0"/>
                 <a:ea typeface="Arial" pitchFamily="34" charset="-122"/>
@@ -4277,7 +4277,7 @@
           <a:noFill/>
           <a:ln w="9525">
             <a:solidFill>
-              <a:srgbClr val="E3E6EE"/>
+              <a:srgbClr val="E2E5E1"/>
             </a:solidFill>
             <a:prstDash val="solid"/>
           </a:ln>
@@ -4313,7 +4313,7 @@
             <a:r>
               <a:rPr lang="en-US" sz="1150" dirty="0">
                 <a:solidFill>
-                  <a:srgbClr val="3D4556"/>
+                  <a:srgbClr val="3A423F"/>
                 </a:solidFill>
                 <a:latin typeface="Arial" pitchFamily="34" charset="0"/>
                 <a:ea typeface="Arial" pitchFamily="34" charset="-122"/>
@@ -4355,7 +4355,7 @@
             <a:r>
               <a:rPr lang="en-US" sz="1150" dirty="0">
                 <a:solidFill>
-                  <a:srgbClr val="0B0F19"/>
+                  <a:srgbClr val="14181A"/>
                 </a:solidFill>
                 <a:latin typeface="Arial" pitchFamily="34" charset="0"/>
                 <a:ea typeface="Arial" pitchFamily="34" charset="-122"/>
@@ -4384,7 +4384,7 @@
           <a:noFill/>
           <a:ln w="9525">
             <a:solidFill>
-              <a:srgbClr val="E3E6EE"/>
+              <a:srgbClr val="E2E5E1"/>
             </a:solidFill>
             <a:prstDash val="solid"/>
           </a:ln>
@@ -4417,7 +4417,7 @@
             <a:r>
               <a:rPr lang="en-US" sz="900" dirty="0">
                 <a:solidFill>
-                  <a:srgbClr val="5B6475"/>
+                  <a:srgbClr val="575F5C"/>
                 </a:solidFill>
                 <a:latin typeface="Arial" pitchFamily="34" charset="0"/>
                 <a:ea typeface="Arial" pitchFamily="34" charset="-122"/>
@@ -4456,7 +4456,7 @@
             <a:r>
               <a:rPr lang="en-US" sz="900" dirty="0">
                 <a:solidFill>
-                  <a:srgbClr val="5B6475"/>
+                  <a:srgbClr val="575F5C"/>
                 </a:solidFill>
                 <a:latin typeface="Arial" pitchFamily="34" charset="0"/>
                 <a:ea typeface="Arial" pitchFamily="34" charset="-122"/>
@@ -4551,7 +4551,7 @@
             <a:r>
               <a:rPr lang="en-US" sz="1600" b="1" dirty="0">
                 <a:solidFill>
-                  <a:srgbClr val="0B0F19"/>
+                  <a:srgbClr val="14181A"/>
                 </a:solidFill>
                 <a:latin typeface="Arial" pitchFamily="34" charset="0"/>
                 <a:ea typeface="Arial" pitchFamily="34" charset="-122"/>
@@ -4590,7 +4590,7 @@
             <a:r>
               <a:rPr lang="en-US" sz="1000" dirty="0">
                 <a:solidFill>
-                  <a:srgbClr val="5B6475"/>
+                  <a:srgbClr val="575F5C"/>
                 </a:solidFill>
                 <a:latin typeface="Arial" pitchFamily="34" charset="0"/>
                 <a:ea typeface="Arial" pitchFamily="34" charset="-122"/>
@@ -4611,17 +4611,17 @@
         <p:spPr>
           <a:xfrm>
             <a:off x="731520" y="877824"/>
-            <a:ext cx="10725912" cy="25603"/>
+            <a:ext cx="10725912" cy="10973"/>
           </a:xfrm>
           <a:prstGeom prst="rect">
             <a:avLst/>
           </a:prstGeom>
           <a:solidFill>
-            <a:srgbClr val="38C9FF"/>
+            <a:srgbClr val="E2E5E1"/>
           </a:solidFill>
           <a:ln w="12700">
             <a:solidFill>
-              <a:srgbClr val="38C9FF"/>
+              <a:srgbClr val="E2E5E1"/>
             </a:solidFill>
             <a:prstDash val="solid"/>
           </a:ln>
@@ -4657,7 +4657,7 @@
             <a:r>
               <a:rPr lang="en-US" sz="2600" b="1" dirty="0">
                 <a:solidFill>
-                  <a:srgbClr val="4636B0"/>
+                  <a:srgbClr val="14181A"/>
                 </a:solidFill>
                 <a:latin typeface="Arial" pitchFamily="34" charset="0"/>
                 <a:ea typeface="Arial" pitchFamily="34" charset="-122"/>
@@ -4699,7 +4699,7 @@
             <a:r>
               <a:rPr lang="en-US" sz="1250" dirty="0">
                 <a:solidFill>
-                  <a:srgbClr val="3D4556"/>
+                  <a:srgbClr val="3A423F"/>
                 </a:solidFill>
                 <a:latin typeface="Arial" pitchFamily="34" charset="0"/>
                 <a:ea typeface="Arial" pitchFamily="34" charset="-122"/>
@@ -4724,7 +4724,7 @@
           </a:xfrm>
           <a:prstGeom prst="roundRect">
             <a:avLst>
-              <a:gd name="adj" fmla="val 2339"/>
+              <a:gd name="adj" fmla="val 1170"/>
             </a:avLst>
           </a:prstGeom>
           <a:solidFill>
@@ -4732,7 +4732,7 @@
           </a:solidFill>
           <a:ln w="12700">
             <a:solidFill>
-              <a:srgbClr val="E3E6EE"/>
+              <a:srgbClr val="E2E5E1"/>
             </a:solidFill>
             <a:prstDash val="solid"/>
           </a:ln>
@@ -4789,7 +4789,7 @@
             <a:r>
               <a:rPr lang="en-US" sz="1000" i="1" dirty="0">
                 <a:solidFill>
-                  <a:srgbClr val="5B6475"/>
+                  <a:srgbClr val="575F5C"/>
                 </a:solidFill>
                 <a:latin typeface="Arial" pitchFamily="34" charset="0"/>
                 <a:ea typeface="Arial" pitchFamily="34" charset="-122"/>
@@ -4828,7 +4828,7 @@
             <a:r>
               <a:rPr lang="en-US" sz="900" dirty="0">
                 <a:solidFill>
-                  <a:srgbClr val="5B6475"/>
+                  <a:srgbClr val="575F5C"/>
                 </a:solidFill>
                 <a:latin typeface="Arial" pitchFamily="34" charset="0"/>
                 <a:ea typeface="Arial" pitchFamily="34" charset="-122"/>
@@ -4867,7 +4867,7 @@
             <a:r>
               <a:rPr lang="en-US" sz="900" dirty="0">
                 <a:solidFill>
-                  <a:srgbClr val="5B6475"/>
+                  <a:srgbClr val="575F5C"/>
                 </a:solidFill>
                 <a:latin typeface="Arial" pitchFamily="34" charset="0"/>
                 <a:ea typeface="Arial" pitchFamily="34" charset="-122"/>
@@ -4962,7 +4962,7 @@
             <a:r>
               <a:rPr lang="en-US" sz="1600" b="1" dirty="0">
                 <a:solidFill>
-                  <a:srgbClr val="0B0F19"/>
+                  <a:srgbClr val="14181A"/>
                 </a:solidFill>
                 <a:latin typeface="Arial" pitchFamily="34" charset="0"/>
                 <a:ea typeface="Arial" pitchFamily="34" charset="-122"/>
@@ -5001,7 +5001,7 @@
             <a:r>
               <a:rPr lang="en-US" sz="1000" dirty="0">
                 <a:solidFill>
-                  <a:srgbClr val="5B6475"/>
+                  <a:srgbClr val="575F5C"/>
                 </a:solidFill>
                 <a:latin typeface="Arial" pitchFamily="34" charset="0"/>
                 <a:ea typeface="Arial" pitchFamily="34" charset="-122"/>
@@ -5022,17 +5022,17 @@
         <p:spPr>
           <a:xfrm>
             <a:off x="731520" y="877824"/>
-            <a:ext cx="10725912" cy="25603"/>
+            <a:ext cx="10725912" cy="10973"/>
           </a:xfrm>
           <a:prstGeom prst="rect">
             <a:avLst/>
           </a:prstGeom>
           <a:solidFill>
-            <a:srgbClr val="38C9FF"/>
+            <a:srgbClr val="E2E5E1"/>
           </a:solidFill>
           <a:ln w="12700">
             <a:solidFill>
-              <a:srgbClr val="38C9FF"/>
+              <a:srgbClr val="E2E5E1"/>
             </a:solidFill>
             <a:prstDash val="solid"/>
           </a:ln>
@@ -5068,7 +5068,7 @@
             <a:r>
               <a:rPr lang="en-US" sz="2300" b="1" dirty="0">
                 <a:solidFill>
-                  <a:srgbClr val="4636B0"/>
+                  <a:srgbClr val="14181A"/>
                 </a:solidFill>
                 <a:latin typeface="Arial" pitchFamily="34" charset="0"/>
                 <a:ea typeface="Arial" pitchFamily="34" charset="-122"/>
@@ -5113,7 +5113,7 @@
             <a:r>
               <a:rPr lang="en-US" sz="1250" dirty="0">
                 <a:solidFill>
-                  <a:srgbClr val="3D4556"/>
+                  <a:srgbClr val="3A423F"/>
                 </a:solidFill>
                 <a:latin typeface="Arial" pitchFamily="34" charset="0"/>
                 <a:ea typeface="Arial" pitchFamily="34" charset="-122"/>
@@ -5136,7 +5136,7 @@
             <a:r>
               <a:rPr lang="en-US" sz="1250" dirty="0">
                 <a:solidFill>
-                  <a:srgbClr val="3D4556"/>
+                  <a:srgbClr val="3A423F"/>
                 </a:solidFill>
                 <a:latin typeface="Arial" pitchFamily="34" charset="0"/>
                 <a:ea typeface="Arial" pitchFamily="34" charset="-122"/>
@@ -5161,7 +5161,7 @@
           </a:xfrm>
           <a:prstGeom prst="roundRect">
             <a:avLst>
-              <a:gd name="adj" fmla="val 1717"/>
+              <a:gd name="adj" fmla="val 859"/>
             </a:avLst>
           </a:prstGeom>
           <a:solidFill>
@@ -5169,7 +5169,7 @@
           </a:solidFill>
           <a:ln w="12700">
             <a:solidFill>
-              <a:srgbClr val="E3E6EE"/>
+              <a:srgbClr val="E2E5E1"/>
             </a:solidFill>
             <a:prstDash val="solid"/>
           </a:ln>
@@ -5226,7 +5226,7 @@
             <a:r>
               <a:rPr lang="en-US" sz="1000" i="1" dirty="0">
                 <a:solidFill>
-                  <a:srgbClr val="5B6475"/>
+                  <a:srgbClr val="575F5C"/>
                 </a:solidFill>
                 <a:latin typeface="Arial" pitchFamily="34" charset="0"/>
                 <a:ea typeface="Arial" pitchFamily="34" charset="-122"/>
@@ -5265,7 +5265,7 @@
             <a:r>
               <a:rPr lang="en-US" sz="900" dirty="0">
                 <a:solidFill>
-                  <a:srgbClr val="5B6475"/>
+                  <a:srgbClr val="575F5C"/>
                 </a:solidFill>
                 <a:latin typeface="Arial" pitchFamily="34" charset="0"/>
                 <a:ea typeface="Arial" pitchFamily="34" charset="-122"/>
@@ -5304,7 +5304,7 @@
             <a:r>
               <a:rPr lang="en-US" sz="900" dirty="0">
                 <a:solidFill>
-                  <a:srgbClr val="5B6475"/>
+                  <a:srgbClr val="575F5C"/>
                 </a:solidFill>
                 <a:latin typeface="Arial" pitchFamily="34" charset="0"/>
                 <a:ea typeface="Arial" pitchFamily="34" charset="-122"/>
@@ -5399,7 +5399,7 @@
             <a:r>
               <a:rPr lang="en-US" sz="1600" b="1" dirty="0">
                 <a:solidFill>
-                  <a:srgbClr val="0B0F19"/>
+                  <a:srgbClr val="14181A"/>
                 </a:solidFill>
                 <a:latin typeface="Arial" pitchFamily="34" charset="0"/>
                 <a:ea typeface="Arial" pitchFamily="34" charset="-122"/>
@@ -5438,7 +5438,7 @@
             <a:r>
               <a:rPr lang="en-US" sz="1000" dirty="0">
                 <a:solidFill>
-                  <a:srgbClr val="5B6475"/>
+                  <a:srgbClr val="575F5C"/>
                 </a:solidFill>
                 <a:latin typeface="Arial" pitchFamily="34" charset="0"/>
                 <a:ea typeface="Arial" pitchFamily="34" charset="-122"/>
@@ -5459,17 +5459,17 @@
         <p:spPr>
           <a:xfrm>
             <a:off x="731520" y="877824"/>
-            <a:ext cx="10725912" cy="25603"/>
+            <a:ext cx="10725912" cy="10973"/>
           </a:xfrm>
           <a:prstGeom prst="rect">
             <a:avLst/>
           </a:prstGeom>
           <a:solidFill>
-            <a:srgbClr val="38C9FF"/>
+            <a:srgbClr val="E2E5E1"/>
           </a:solidFill>
           <a:ln w="12700">
             <a:solidFill>
-              <a:srgbClr val="38C9FF"/>
+              <a:srgbClr val="E2E5E1"/>
             </a:solidFill>
             <a:prstDash val="solid"/>
           </a:ln>
@@ -5505,7 +5505,7 @@
             <a:r>
               <a:rPr lang="en-US" sz="2500" b="1" dirty="0">
                 <a:solidFill>
-                  <a:srgbClr val="4636B0"/>
+                  <a:srgbClr val="14181A"/>
                 </a:solidFill>
                 <a:latin typeface="Arial" pitchFamily="34" charset="0"/>
                 <a:ea typeface="Arial" pitchFamily="34" charset="-122"/>
@@ -5547,7 +5547,7 @@
             <a:r>
               <a:rPr lang="en-US" sz="1150" dirty="0">
                 <a:solidFill>
-                  <a:srgbClr val="5B6475"/>
+                  <a:srgbClr val="575F5C"/>
                 </a:solidFill>
                 <a:latin typeface="Arial" pitchFamily="34" charset="0"/>
                 <a:ea typeface="Arial" pitchFamily="34" charset="-122"/>
@@ -5572,15 +5572,15 @@
           </a:xfrm>
           <a:prstGeom prst="roundRect">
             <a:avLst>
-              <a:gd name="adj" fmla="val 4000"/>
+              <a:gd name="adj" fmla="val 1333"/>
             </a:avLst>
           </a:prstGeom>
           <a:solidFill>
-            <a:srgbClr val="FFFFFF"/>
+            <a:srgbClr val="F2F3F1"/>
           </a:solidFill>
           <a:ln w="12700">
             <a:solidFill>
-              <a:srgbClr val="E3E6EE"/>
+              <a:srgbClr val="F2F3F1"/>
             </a:solidFill>
             <a:prstDash val="solid"/>
           </a:ln>
@@ -5613,7 +5613,7 @@
             <a:r>
               <a:rPr lang="en-US" sz="1800" b="1" dirty="0">
                 <a:solidFill>
-                  <a:srgbClr val="0B0F19"/>
+                  <a:srgbClr val="14181A"/>
                 </a:solidFill>
                 <a:latin typeface="Arial" pitchFamily="34" charset="0"/>
                 <a:ea typeface="Arial" pitchFamily="34" charset="-122"/>
@@ -5652,13 +5652,13 @@
             <a:r>
               <a:rPr lang="en-US" sz="1100" b="1" dirty="0">
                 <a:solidFill>
-                  <a:srgbClr val="6366F1"/>
-                </a:solidFill>
-                <a:latin typeface="Arial" pitchFamily="34" charset="0"/>
-                <a:ea typeface="Arial" pitchFamily="34" charset="-122"/>
-                <a:cs typeface="Arial" pitchFamily="34" charset="-120"/>
-              </a:rPr>
-              <a:t>2 appareils</a:t>
+                  <a:srgbClr val="1E4D3B"/>
+                </a:solidFill>
+                <a:latin typeface="Arial" pitchFamily="34" charset="0"/>
+                <a:ea typeface="Arial" pitchFamily="34" charset="-122"/>
+                <a:cs typeface="Arial" pitchFamily="34" charset="-120"/>
+              </a:rPr>
+              <a:t>Jusqu’à 2 appareils</a:t>
             </a:r>
             <a:endParaRPr lang="en-US" sz="1100" dirty="0"/>
           </a:p>
@@ -5694,7 +5694,7 @@
             <a:r>
               <a:rPr lang="en-US" sz="1000" dirty="0">
                 <a:solidFill>
-                  <a:srgbClr val="5B6475"/>
+                  <a:srgbClr val="575F5C"/>
                 </a:solidFill>
                 <a:latin typeface="Arial" pitchFamily="34" charset="0"/>
                 <a:ea typeface="Arial" pitchFamily="34" charset="-122"/>
@@ -5733,7 +5733,7 @@
             <a:r>
               <a:rPr lang="en-US" sz="2600" b="1" dirty="0">
                 <a:solidFill>
-                  <a:srgbClr val="4636B0"/>
+                  <a:srgbClr val="14181A"/>
                 </a:solidFill>
                 <a:latin typeface="Arial" pitchFamily="34" charset="0"/>
                 <a:ea typeface="Arial" pitchFamily="34" charset="-122"/>
@@ -5747,7 +5747,7 @@
             <a:r>
               <a:rPr lang="en-US" sz="1050" dirty="0">
                 <a:solidFill>
-                  <a:srgbClr val="5B6475"/>
+                  <a:srgbClr val="575F5C"/>
                 </a:solidFill>
                 <a:latin typeface="Arial" pitchFamily="34" charset="0"/>
                 <a:ea typeface="Arial" pitchFamily="34" charset="-122"/>
@@ -5786,7 +5786,7 @@
             <a:r>
               <a:rPr lang="en-US" sz="950" dirty="0">
                 <a:solidFill>
-                  <a:srgbClr val="1F7A5C"/>
+                  <a:srgbClr val="15704F"/>
                 </a:solidFill>
                 <a:latin typeface="Arial" pitchFamily="34" charset="0"/>
                 <a:ea typeface="Arial" pitchFamily="34" charset="-122"/>
@@ -5811,15 +5811,15 @@
           </a:xfrm>
           <a:prstGeom prst="roundRect">
             <a:avLst>
-              <a:gd name="adj" fmla="val 4000"/>
+              <a:gd name="adj" fmla="val 1333"/>
             </a:avLst>
           </a:prstGeom>
           <a:solidFill>
-            <a:srgbClr val="EEEEFC"/>
+            <a:srgbClr val="E7EDE9"/>
           </a:solidFill>
-          <a:ln w="19050">
+          <a:ln w="15875">
             <a:solidFill>
-              <a:srgbClr val="6366F1"/>
+              <a:srgbClr val="1E4D3B"/>
             </a:solidFill>
             <a:prstDash val="solid"/>
           </a:ln>
@@ -5852,7 +5852,7 @@
             <a:r>
               <a:rPr lang="en-US" sz="800" b="1" spc="60" kern="0" dirty="0">
                 <a:solidFill>
-                  <a:srgbClr val="6366F1"/>
+                  <a:srgbClr val="1E4D3B"/>
                 </a:solidFill>
                 <a:latin typeface="Arial" pitchFamily="34" charset="0"/>
                 <a:ea typeface="Arial" pitchFamily="34" charset="-122"/>
@@ -5891,7 +5891,7 @@
             <a:r>
               <a:rPr lang="en-US" sz="1800" b="1" dirty="0">
                 <a:solidFill>
-                  <a:srgbClr val="0B0F19"/>
+                  <a:srgbClr val="14181A"/>
                 </a:solidFill>
                 <a:latin typeface="Arial" pitchFamily="34" charset="0"/>
                 <a:ea typeface="Arial" pitchFamily="34" charset="-122"/>
@@ -5930,13 +5930,13 @@
             <a:r>
               <a:rPr lang="en-US" sz="1100" b="1" dirty="0">
                 <a:solidFill>
-                  <a:srgbClr val="6366F1"/>
-                </a:solidFill>
-                <a:latin typeface="Arial" pitchFamily="34" charset="0"/>
-                <a:ea typeface="Arial" pitchFamily="34" charset="-122"/>
-                <a:cs typeface="Arial" pitchFamily="34" charset="-120"/>
-              </a:rPr>
-              <a:t>3 à 20 appareils</a:t>
+                  <a:srgbClr val="1E4D3B"/>
+                </a:solidFill>
+                <a:latin typeface="Arial" pitchFamily="34" charset="0"/>
+                <a:ea typeface="Arial" pitchFamily="34" charset="-122"/>
+                <a:cs typeface="Arial" pitchFamily="34" charset="-120"/>
+              </a:rPr>
+              <a:t>Jusqu’à 20 appareils</a:t>
             </a:r>
             <a:endParaRPr lang="en-US" sz="1100" dirty="0"/>
           </a:p>
@@ -5972,7 +5972,7 @@
             <a:r>
               <a:rPr lang="en-US" sz="1000" dirty="0">
                 <a:solidFill>
-                  <a:srgbClr val="5B6475"/>
+                  <a:srgbClr val="575F5C"/>
                 </a:solidFill>
                 <a:latin typeface="Arial" pitchFamily="34" charset="0"/>
                 <a:ea typeface="Arial" pitchFamily="34" charset="-122"/>
@@ -6011,7 +6011,7 @@
             <a:r>
               <a:rPr lang="en-US" sz="2600" b="1" dirty="0">
                 <a:solidFill>
-                  <a:srgbClr val="4636B0"/>
+                  <a:srgbClr val="14181A"/>
                 </a:solidFill>
                 <a:latin typeface="Arial" pitchFamily="34" charset="0"/>
                 <a:ea typeface="Arial" pitchFamily="34" charset="-122"/>
@@ -6025,7 +6025,7 @@
             <a:r>
               <a:rPr lang="en-US" sz="1050" dirty="0">
                 <a:solidFill>
-                  <a:srgbClr val="5B6475"/>
+                  <a:srgbClr val="575F5C"/>
                 </a:solidFill>
                 <a:latin typeface="Arial" pitchFamily="34" charset="0"/>
                 <a:ea typeface="Arial" pitchFamily="34" charset="-122"/>
@@ -6064,7 +6064,7 @@
             <a:r>
               <a:rPr lang="en-US" sz="950" dirty="0">
                 <a:solidFill>
-                  <a:srgbClr val="1F7A5C"/>
+                  <a:srgbClr val="15704F"/>
                 </a:solidFill>
                 <a:latin typeface="Arial" pitchFamily="34" charset="0"/>
                 <a:ea typeface="Arial" pitchFamily="34" charset="-122"/>
@@ -6089,15 +6089,15 @@
           </a:xfrm>
           <a:prstGeom prst="roundRect">
             <a:avLst>
-              <a:gd name="adj" fmla="val 4000"/>
+              <a:gd name="adj" fmla="val 1333"/>
             </a:avLst>
           </a:prstGeom>
           <a:solidFill>
-            <a:srgbClr val="FFFFFF"/>
+            <a:srgbClr val="F2F3F1"/>
           </a:solidFill>
           <a:ln w="12700">
             <a:solidFill>
-              <a:srgbClr val="E3E6EE"/>
+              <a:srgbClr val="F2F3F1"/>
             </a:solidFill>
             <a:prstDash val="solid"/>
           </a:ln>
@@ -6130,7 +6130,7 @@
             <a:r>
               <a:rPr lang="en-US" sz="1800" b="1" dirty="0">
                 <a:solidFill>
-                  <a:srgbClr val="0B0F19"/>
+                  <a:srgbClr val="14181A"/>
                 </a:solidFill>
                 <a:latin typeface="Arial" pitchFamily="34" charset="0"/>
                 <a:ea typeface="Arial" pitchFamily="34" charset="-122"/>
@@ -6169,13 +6169,13 @@
             <a:r>
               <a:rPr lang="en-US" sz="1100" b="1" dirty="0">
                 <a:solidFill>
-                  <a:srgbClr val="6366F1"/>
-                </a:solidFill>
-                <a:latin typeface="Arial" pitchFamily="34" charset="0"/>
-                <a:ea typeface="Arial" pitchFamily="34" charset="-122"/>
-                <a:cs typeface="Arial" pitchFamily="34" charset="-120"/>
-              </a:rPr>
-              <a:t>21 à 100 appareils</a:t>
+                  <a:srgbClr val="1E4D3B"/>
+                </a:solidFill>
+                <a:latin typeface="Arial" pitchFamily="34" charset="0"/>
+                <a:ea typeface="Arial" pitchFamily="34" charset="-122"/>
+                <a:cs typeface="Arial" pitchFamily="34" charset="-120"/>
+              </a:rPr>
+              <a:t>Jusqu’à 100 appareils</a:t>
             </a:r>
             <a:endParaRPr lang="en-US" sz="1100" dirty="0"/>
           </a:p>
@@ -6211,7 +6211,7 @@
             <a:r>
               <a:rPr lang="en-US" sz="1000" dirty="0">
                 <a:solidFill>
-                  <a:srgbClr val="5B6475"/>
+                  <a:srgbClr val="575F5C"/>
                 </a:solidFill>
                 <a:latin typeface="Arial" pitchFamily="34" charset="0"/>
                 <a:ea typeface="Arial" pitchFamily="34" charset="-122"/>
@@ -6250,7 +6250,7 @@
             <a:r>
               <a:rPr lang="en-US" sz="2600" b="1" dirty="0">
                 <a:solidFill>
-                  <a:srgbClr val="4636B0"/>
+                  <a:srgbClr val="14181A"/>
                 </a:solidFill>
                 <a:latin typeface="Arial" pitchFamily="34" charset="0"/>
                 <a:ea typeface="Arial" pitchFamily="34" charset="-122"/>
@@ -6264,7 +6264,7 @@
             <a:r>
               <a:rPr lang="en-US" sz="1050" dirty="0">
                 <a:solidFill>
-                  <a:srgbClr val="5B6475"/>
+                  <a:srgbClr val="575F5C"/>
                 </a:solidFill>
                 <a:latin typeface="Arial" pitchFamily="34" charset="0"/>
                 <a:ea typeface="Arial" pitchFamily="34" charset="-122"/>
@@ -6303,7 +6303,7 @@
             <a:r>
               <a:rPr lang="en-US" sz="950" dirty="0">
                 <a:solidFill>
-                  <a:srgbClr val="1F7A5C"/>
+                  <a:srgbClr val="15704F"/>
                 </a:solidFill>
                 <a:latin typeface="Arial" pitchFamily="34" charset="0"/>
                 <a:ea typeface="Arial" pitchFamily="34" charset="-122"/>
@@ -6328,15 +6328,15 @@
           </a:xfrm>
           <a:prstGeom prst="roundRect">
             <a:avLst>
-              <a:gd name="adj" fmla="val 8421"/>
+              <a:gd name="adj" fmla="val 4211"/>
             </a:avLst>
           </a:prstGeom>
           <a:solidFill>
-            <a:srgbClr val="F4F5F9"/>
+            <a:srgbClr val="F2F3F1"/>
           </a:solidFill>
           <a:ln w="12700">
             <a:solidFill>
-              <a:srgbClr val="F4F5F9"/>
+              <a:srgbClr val="F2F3F1"/>
             </a:solidFill>
             <a:prstDash val="solid"/>
           </a:ln>
@@ -6369,7 +6369,7 @@
             <a:r>
               <a:rPr lang="en-US" sz="950" b="1" dirty="0">
                 <a:solidFill>
-                  <a:srgbClr val="5B6475"/>
+                  <a:srgbClr val="575F5C"/>
                 </a:solidFill>
                 <a:latin typeface="Arial" pitchFamily="34" charset="0"/>
                 <a:ea typeface="Arial" pitchFamily="34" charset="-122"/>
@@ -6411,7 +6411,7 @@
             <a:r>
               <a:rPr lang="en-US" sz="1150" i="1" dirty="0">
                 <a:solidFill>
-                  <a:srgbClr val="3D4556"/>
+                  <a:srgbClr val="3A423F"/>
                 </a:solidFill>
                 <a:latin typeface="Arial" pitchFamily="34" charset="0"/>
                 <a:ea typeface="Arial" pitchFamily="34" charset="-122"/>
@@ -6450,7 +6450,7 @@
             <a:r>
               <a:rPr lang="en-US" sz="900" dirty="0">
                 <a:solidFill>
-                  <a:srgbClr val="5B6475"/>
+                  <a:srgbClr val="575F5C"/>
                 </a:solidFill>
                 <a:latin typeface="Arial" pitchFamily="34" charset="0"/>
                 <a:ea typeface="Arial" pitchFamily="34" charset="-122"/>
@@ -6489,7 +6489,7 @@
             <a:r>
               <a:rPr lang="en-US" sz="900" dirty="0">
                 <a:solidFill>
-                  <a:srgbClr val="5B6475"/>
+                  <a:srgbClr val="575F5C"/>
                 </a:solidFill>
                 <a:latin typeface="Arial" pitchFamily="34" charset="0"/>
                 <a:ea typeface="Arial" pitchFamily="34" charset="-122"/>
@@ -6584,7 +6584,7 @@
             <a:r>
               <a:rPr lang="en-US" sz="1600" b="1" dirty="0">
                 <a:solidFill>
-                  <a:srgbClr val="0B0F19"/>
+                  <a:srgbClr val="14181A"/>
                 </a:solidFill>
                 <a:latin typeface="Arial" pitchFamily="34" charset="0"/>
                 <a:ea typeface="Arial" pitchFamily="34" charset="-122"/>
@@ -6623,7 +6623,7 @@
             <a:r>
               <a:rPr lang="en-US" sz="1000" dirty="0">
                 <a:solidFill>
-                  <a:srgbClr val="5B6475"/>
+                  <a:srgbClr val="575F5C"/>
                 </a:solidFill>
                 <a:latin typeface="Arial" pitchFamily="34" charset="0"/>
                 <a:ea typeface="Arial" pitchFamily="34" charset="-122"/>
@@ -6644,17 +6644,17 @@
         <p:spPr>
           <a:xfrm>
             <a:off x="731520" y="877824"/>
-            <a:ext cx="10725912" cy="25603"/>
+            <a:ext cx="10725912" cy="10973"/>
           </a:xfrm>
           <a:prstGeom prst="rect">
             <a:avLst/>
           </a:prstGeom>
           <a:solidFill>
-            <a:srgbClr val="38C9FF"/>
+            <a:srgbClr val="E2E5E1"/>
           </a:solidFill>
           <a:ln w="12700">
             <a:solidFill>
-              <a:srgbClr val="38C9FF"/>
+              <a:srgbClr val="E2E5E1"/>
             </a:solidFill>
             <a:prstDash val="solid"/>
           </a:ln>
@@ -6690,7 +6690,7 @@
             <a:r>
               <a:rPr lang="en-US" sz="2600" b="1" dirty="0">
                 <a:solidFill>
-                  <a:srgbClr val="4636B0"/>
+                  <a:srgbClr val="14181A"/>
                 </a:solidFill>
                 <a:latin typeface="Arial" pitchFamily="34" charset="0"/>
                 <a:ea typeface="Arial" pitchFamily="34" charset="-122"/>
@@ -6732,7 +6732,7 @@
             <a:r>
               <a:rPr lang="en-US" sz="1250" i="1" dirty="0">
                 <a:solidFill>
-                  <a:srgbClr val="5B6475"/>
+                  <a:srgbClr val="575F5C"/>
                 </a:solidFill>
                 <a:latin typeface="Arial" pitchFamily="34" charset="0"/>
                 <a:ea typeface="Arial" pitchFamily="34" charset="-122"/>
@@ -6777,7 +6777,7 @@
             <a:r>
               <a:rPr lang="en-US" sz="1300" b="1" dirty="0">
                 <a:solidFill>
-                  <a:srgbClr val="0B0F19"/>
+                  <a:srgbClr val="14181A"/>
                 </a:solidFill>
                 <a:latin typeface="Arial" pitchFamily="34" charset="0"/>
                 <a:ea typeface="Arial" pitchFamily="34" charset="-122"/>
@@ -6797,7 +6797,7 @@
             <a:r>
               <a:rPr lang="en-US" sz="1300" dirty="0">
                 <a:solidFill>
-                  <a:srgbClr val="3D4556"/>
+                  <a:srgbClr val="3A423F"/>
                 </a:solidFill>
                 <a:latin typeface="Arial" pitchFamily="34" charset="0"/>
                 <a:ea typeface="Arial" pitchFamily="34" charset="-122"/>
@@ -6820,7 +6820,7 @@
             <a:r>
               <a:rPr lang="en-US" sz="1300" b="1" dirty="0">
                 <a:solidFill>
-                  <a:srgbClr val="0B0F19"/>
+                  <a:srgbClr val="14181A"/>
                 </a:solidFill>
                 <a:latin typeface="Arial" pitchFamily="34" charset="0"/>
                 <a:ea typeface="Arial" pitchFamily="34" charset="-122"/>
@@ -6840,7 +6840,7 @@
             <a:r>
               <a:rPr lang="en-US" sz="1300" dirty="0">
                 <a:solidFill>
-                  <a:srgbClr val="3D4556"/>
+                  <a:srgbClr val="3A423F"/>
                 </a:solidFill>
                 <a:latin typeface="Arial" pitchFamily="34" charset="0"/>
                 <a:ea typeface="Arial" pitchFamily="34" charset="-122"/>
@@ -6863,7 +6863,7 @@
             <a:r>
               <a:rPr lang="en-US" sz="1300" b="1" dirty="0">
                 <a:solidFill>
-                  <a:srgbClr val="0B0F19"/>
+                  <a:srgbClr val="14181A"/>
                 </a:solidFill>
                 <a:latin typeface="Arial" pitchFamily="34" charset="0"/>
                 <a:ea typeface="Arial" pitchFamily="34" charset="-122"/>
@@ -6883,7 +6883,7 @@
             <a:r>
               <a:rPr lang="en-US" sz="1300" dirty="0">
                 <a:solidFill>
-                  <a:srgbClr val="3D4556"/>
+                  <a:srgbClr val="3A423F"/>
                 </a:solidFill>
                 <a:latin typeface="Arial" pitchFamily="34" charset="0"/>
                 <a:ea typeface="Arial" pitchFamily="34" charset="-122"/>
@@ -6908,15 +6908,15 @@
           </a:xfrm>
           <a:prstGeom prst="roundRect">
             <a:avLst>
-              <a:gd name="adj" fmla="val 7273"/>
+              <a:gd name="adj" fmla="val 3636"/>
             </a:avLst>
           </a:prstGeom>
           <a:solidFill>
-            <a:srgbClr val="EEEEFC"/>
+            <a:srgbClr val="E7EDE9"/>
           </a:solidFill>
           <a:ln w="12700">
             <a:solidFill>
-              <a:srgbClr val="EEEEFC"/>
+              <a:srgbClr val="E7EDE9"/>
             </a:solidFill>
             <a:prstDash val="solid"/>
           </a:ln>
@@ -6949,7 +6949,7 @@
             <a:r>
               <a:rPr lang="en-US" sz="950" b="1" dirty="0">
                 <a:solidFill>
-                  <a:srgbClr val="5B6475"/>
+                  <a:srgbClr val="575F5C"/>
                 </a:solidFill>
                 <a:latin typeface="Arial" pitchFamily="34" charset="0"/>
                 <a:ea typeface="Arial" pitchFamily="34" charset="-122"/>
@@ -6991,7 +6991,7 @@
             <a:r>
               <a:rPr lang="en-US" sz="1150" i="1" dirty="0">
                 <a:solidFill>
-                  <a:srgbClr val="3D4556"/>
+                  <a:srgbClr val="3A423F"/>
                 </a:solidFill>
                 <a:latin typeface="Arial" pitchFamily="34" charset="0"/>
                 <a:ea typeface="Arial" pitchFamily="34" charset="-122"/>
@@ -7030,7 +7030,7 @@
             <a:r>
               <a:rPr lang="en-US" sz="900" dirty="0">
                 <a:solidFill>
-                  <a:srgbClr val="5B6475"/>
+                  <a:srgbClr val="575F5C"/>
                 </a:solidFill>
                 <a:latin typeface="Arial" pitchFamily="34" charset="0"/>
                 <a:ea typeface="Arial" pitchFamily="34" charset="-122"/>
@@ -7069,7 +7069,7 @@
             <a:r>
               <a:rPr lang="en-US" sz="900" dirty="0">
                 <a:solidFill>
-                  <a:srgbClr val="5B6475"/>
+                  <a:srgbClr val="575F5C"/>
                 </a:solidFill>
                 <a:latin typeface="Arial" pitchFamily="34" charset="0"/>
                 <a:ea typeface="Arial" pitchFamily="34" charset="-122"/>
@@ -7164,7 +7164,7 @@
             <a:r>
               <a:rPr lang="en-US" sz="1600" b="1" dirty="0">
                 <a:solidFill>
-                  <a:srgbClr val="0B0F19"/>
+                  <a:srgbClr val="14181A"/>
                 </a:solidFill>
                 <a:latin typeface="Arial" pitchFamily="34" charset="0"/>
                 <a:ea typeface="Arial" pitchFamily="34" charset="-122"/>
@@ -7203,7 +7203,7 @@
             <a:r>
               <a:rPr lang="en-US" sz="1000" dirty="0">
                 <a:solidFill>
-                  <a:srgbClr val="5B6475"/>
+                  <a:srgbClr val="575F5C"/>
                 </a:solidFill>
                 <a:latin typeface="Arial" pitchFamily="34" charset="0"/>
                 <a:ea typeface="Arial" pitchFamily="34" charset="-122"/>
@@ -7224,17 +7224,17 @@
         <p:spPr>
           <a:xfrm>
             <a:off x="731520" y="877824"/>
-            <a:ext cx="10725912" cy="25603"/>
+            <a:ext cx="10725912" cy="10973"/>
           </a:xfrm>
           <a:prstGeom prst="rect">
             <a:avLst/>
           </a:prstGeom>
           <a:solidFill>
-            <a:srgbClr val="38C9FF"/>
+            <a:srgbClr val="E2E5E1"/>
           </a:solidFill>
           <a:ln w="12700">
             <a:solidFill>
-              <a:srgbClr val="38C9FF"/>
+              <a:srgbClr val="E2E5E1"/>
             </a:solidFill>
             <a:prstDash val="solid"/>
           </a:ln>
@@ -7270,7 +7270,7 @@
             <a:r>
               <a:rPr lang="en-US" sz="2600" b="1" dirty="0">
                 <a:solidFill>
-                  <a:srgbClr val="4636B0"/>
+                  <a:srgbClr val="14181A"/>
                 </a:solidFill>
                 <a:latin typeface="Arial" pitchFamily="34" charset="0"/>
                 <a:ea typeface="Arial" pitchFamily="34" charset="-122"/>
@@ -7312,7 +7312,7 @@
             <a:r>
               <a:rPr lang="en-US" sz="1250" i="1" dirty="0">
                 <a:solidFill>
-                  <a:srgbClr val="5B6475"/>
+                  <a:srgbClr val="575F5C"/>
                 </a:solidFill>
                 <a:latin typeface="Arial" pitchFamily="34" charset="0"/>
                 <a:ea typeface="Arial" pitchFamily="34" charset="-122"/>
@@ -7357,7 +7357,7 @@
             <a:r>
               <a:rPr lang="en-US" sz="1300" b="1" dirty="0">
                 <a:solidFill>
-                  <a:srgbClr val="0B0F19"/>
+                  <a:srgbClr val="14181A"/>
                 </a:solidFill>
                 <a:latin typeface="Arial" pitchFamily="34" charset="0"/>
                 <a:ea typeface="Arial" pitchFamily="34" charset="-122"/>
@@ -7377,7 +7377,7 @@
             <a:r>
               <a:rPr lang="en-US" sz="1300" dirty="0">
                 <a:solidFill>
-                  <a:srgbClr val="3D4556"/>
+                  <a:srgbClr val="3A423F"/>
                 </a:solidFill>
                 <a:latin typeface="Arial" pitchFamily="34" charset="0"/>
                 <a:ea typeface="Arial" pitchFamily="34" charset="-122"/>
@@ -7400,7 +7400,7 @@
             <a:r>
               <a:rPr lang="en-US" sz="1300" b="1" dirty="0">
                 <a:solidFill>
-                  <a:srgbClr val="0B0F19"/>
+                  <a:srgbClr val="14181A"/>
                 </a:solidFill>
                 <a:latin typeface="Arial" pitchFamily="34" charset="0"/>
                 <a:ea typeface="Arial" pitchFamily="34" charset="-122"/>
@@ -7420,7 +7420,7 @@
             <a:r>
               <a:rPr lang="en-US" sz="1300" dirty="0">
                 <a:solidFill>
-                  <a:srgbClr val="3D4556"/>
+                  <a:srgbClr val="3A423F"/>
                 </a:solidFill>
                 <a:latin typeface="Arial" pitchFamily="34" charset="0"/>
                 <a:ea typeface="Arial" pitchFamily="34" charset="-122"/>
@@ -7443,7 +7443,7 @@
             <a:r>
               <a:rPr lang="en-US" sz="1300" b="1" dirty="0">
                 <a:solidFill>
-                  <a:srgbClr val="0B0F19"/>
+                  <a:srgbClr val="14181A"/>
                 </a:solidFill>
                 <a:latin typeface="Arial" pitchFamily="34" charset="0"/>
                 <a:ea typeface="Arial" pitchFamily="34" charset="-122"/>
@@ -7463,7 +7463,7 @@
             <a:r>
               <a:rPr lang="en-US" sz="1300" dirty="0">
                 <a:solidFill>
-                  <a:srgbClr val="3D4556"/>
+                  <a:srgbClr val="3A423F"/>
                 </a:solidFill>
                 <a:latin typeface="Arial" pitchFamily="34" charset="0"/>
                 <a:ea typeface="Arial" pitchFamily="34" charset="-122"/>
@@ -7486,7 +7486,7 @@
             <a:r>
               <a:rPr lang="en-US" sz="1300" b="1" dirty="0">
                 <a:solidFill>
-                  <a:srgbClr val="0B0F19"/>
+                  <a:srgbClr val="14181A"/>
                 </a:solidFill>
                 <a:latin typeface="Arial" pitchFamily="34" charset="0"/>
                 <a:ea typeface="Arial" pitchFamily="34" charset="-122"/>
@@ -7506,7 +7506,7 @@
             <a:r>
               <a:rPr lang="en-US" sz="1300" dirty="0">
                 <a:solidFill>
-                  <a:srgbClr val="3D4556"/>
+                  <a:srgbClr val="3A423F"/>
                 </a:solidFill>
                 <a:latin typeface="Arial" pitchFamily="34" charset="0"/>
                 <a:ea typeface="Arial" pitchFamily="34" charset="-122"/>
@@ -7545,7 +7545,7 @@
             <a:r>
               <a:rPr lang="en-US" sz="900" dirty="0">
                 <a:solidFill>
-                  <a:srgbClr val="5B6475"/>
+                  <a:srgbClr val="575F5C"/>
                 </a:solidFill>
                 <a:latin typeface="Arial" pitchFamily="34" charset="0"/>
                 <a:ea typeface="Arial" pitchFamily="34" charset="-122"/>
@@ -7584,7 +7584,7 @@
             <a:r>
               <a:rPr lang="en-US" sz="900" dirty="0">
                 <a:solidFill>
-                  <a:srgbClr val="5B6475"/>
+                  <a:srgbClr val="575F5C"/>
                 </a:solidFill>
                 <a:latin typeface="Arial" pitchFamily="34" charset="0"/>
                 <a:ea typeface="Arial" pitchFamily="34" charset="-122"/>
